--- a/Tema4/RESUMEN PARA CONSULTAS SIMPLES.pptx
+++ b/Tema4/RESUMEN PARA CONSULTAS SIMPLES.pptx
@@ -310,7 +310,7 @@
           <a:p>
             <a:fld id="{EFA6031D-368C-47B3-B5E4-91DEFF23C3EC}" type="datetimeFigureOut">
               <a:rPr lang="es-ES" smtClean="0"/>
-              <a:t>07/01/2024</a:t>
+              <a:t>05/01/2026</a:t>
             </a:fld>
             <a:endParaRPr lang="es-ES"/>
           </a:p>
@@ -521,7 +521,7 @@
           <a:p>
             <a:fld id="{EFA6031D-368C-47B3-B5E4-91DEFF23C3EC}" type="datetimeFigureOut">
               <a:rPr lang="es-ES" smtClean="0"/>
-              <a:t>07/01/2024</a:t>
+              <a:t>05/01/2026</a:t>
             </a:fld>
             <a:endParaRPr lang="es-ES"/>
           </a:p>
@@ -736,7 +736,7 @@
           <a:p>
             <a:fld id="{EFA6031D-368C-47B3-B5E4-91DEFF23C3EC}" type="datetimeFigureOut">
               <a:rPr lang="es-ES" smtClean="0"/>
-              <a:t>07/01/2024</a:t>
+              <a:t>05/01/2026</a:t>
             </a:fld>
             <a:endParaRPr lang="es-ES"/>
           </a:p>
@@ -937,7 +937,7 @@
           <a:p>
             <a:fld id="{EFA6031D-368C-47B3-B5E4-91DEFF23C3EC}" type="datetimeFigureOut">
               <a:rPr lang="es-ES" smtClean="0"/>
-              <a:t>07/01/2024</a:t>
+              <a:t>05/01/2026</a:t>
             </a:fld>
             <a:endParaRPr lang="es-ES"/>
           </a:p>
@@ -1216,7 +1216,7 @@
           <a:p>
             <a:fld id="{EFA6031D-368C-47B3-B5E4-91DEFF23C3EC}" type="datetimeFigureOut">
               <a:rPr lang="es-ES" smtClean="0"/>
-              <a:t>07/01/2024</a:t>
+              <a:t>05/01/2026</a:t>
             </a:fld>
             <a:endParaRPr lang="es-ES"/>
           </a:p>
@@ -1484,7 +1484,7 @@
           <a:p>
             <a:fld id="{EFA6031D-368C-47B3-B5E4-91DEFF23C3EC}" type="datetimeFigureOut">
               <a:rPr lang="es-ES" smtClean="0"/>
-              <a:t>07/01/2024</a:t>
+              <a:t>05/01/2026</a:t>
             </a:fld>
             <a:endParaRPr lang="es-ES"/>
           </a:p>
@@ -1900,7 +1900,7 @@
           <a:p>
             <a:fld id="{EFA6031D-368C-47B3-B5E4-91DEFF23C3EC}" type="datetimeFigureOut">
               <a:rPr lang="es-ES" smtClean="0"/>
-              <a:t>07/01/2024</a:t>
+              <a:t>05/01/2026</a:t>
             </a:fld>
             <a:endParaRPr lang="es-ES"/>
           </a:p>
@@ -2049,7 +2049,7 @@
           <a:p>
             <a:fld id="{EFA6031D-368C-47B3-B5E4-91DEFF23C3EC}" type="datetimeFigureOut">
               <a:rPr lang="es-ES" smtClean="0"/>
-              <a:t>07/01/2024</a:t>
+              <a:t>05/01/2026</a:t>
             </a:fld>
             <a:endParaRPr lang="es-ES"/>
           </a:p>
@@ -2175,7 +2175,7 @@
           <a:p>
             <a:fld id="{EFA6031D-368C-47B3-B5E4-91DEFF23C3EC}" type="datetimeFigureOut">
               <a:rPr lang="es-ES" smtClean="0"/>
-              <a:t>07/01/2024</a:t>
+              <a:t>05/01/2026</a:t>
             </a:fld>
             <a:endParaRPr lang="es-ES"/>
           </a:p>
@@ -2426,7 +2426,7 @@
           <a:p>
             <a:fld id="{EFA6031D-368C-47B3-B5E4-91DEFF23C3EC}" type="datetimeFigureOut">
               <a:rPr lang="es-ES" smtClean="0"/>
-              <a:t>07/01/2024</a:t>
+              <a:t>05/01/2026</a:t>
             </a:fld>
             <a:endParaRPr lang="es-ES"/>
           </a:p>
@@ -2871,7 +2871,7 @@
           <a:p>
             <a:fld id="{EFA6031D-368C-47B3-B5E4-91DEFF23C3EC}" type="datetimeFigureOut">
               <a:rPr lang="es-ES" smtClean="0"/>
-              <a:t>07/01/2024</a:t>
+              <a:t>05/01/2026</a:t>
             </a:fld>
             <a:endParaRPr lang="es-ES"/>
           </a:p>
@@ -3038,6 +3038,13 @@
             <a:schemeClr val="lt1"/>
           </a:fontRef>
         </p:style>
+        <p:txBody>
+          <a:bodyPr/>
+          <a:lstStyle/>
+          <a:p>
+            <a:endParaRPr lang="es-ES"/>
+          </a:p>
+        </p:txBody>
       </p:sp>
       <p:pic>
         <p:nvPicPr>
@@ -3198,7 +3205,7 @@
           <a:p>
             <a:fld id="{EFA6031D-368C-47B3-B5E4-91DEFF23C3EC}" type="datetimeFigureOut">
               <a:rPr lang="es-ES" smtClean="0"/>
-              <a:t>07/01/2024</a:t>
+              <a:t>05/01/2026</a:t>
             </a:fld>
             <a:endParaRPr lang="es-ES"/>
           </a:p>
@@ -6347,7 +6354,15 @@
           <a:p>
             <a:r>
               <a:rPr lang="es-ES" dirty="0"/>
-              <a:t>Operador IS, AND, OR, NOT:</a:t>
+              <a:t>Operador IS,  AND, OR</a:t>
+            </a:r>
+            <a:r>
+              <a:rPr lang="es-ES"/>
+              <a:t>,  NOT</a:t>
+            </a:r>
+            <a:r>
+              <a:rPr lang="es-ES" dirty="0"/>
+              <a:t>:</a:t>
             </a:r>
           </a:p>
           <a:p>
